--- a/Project_Presentation.pptx
+++ b/Project_Presentation.pptx
@@ -4,6 +4,9 @@
   <p:sldMasterIdLst>
     <p:sldMasterId id="2147483648" r:id="rId1"/>
   </p:sldMasterIdLst>
+  <p:notesMasterIdLst>
+    <p:notesMasterId r:id="rId8"/>
+  </p:notesMasterIdLst>
   <p:sldIdLst>
     <p:sldId id="256" r:id="rId2"/>
     <p:sldId id="257" r:id="rId3"/>
@@ -12,9 +15,6 @@
     <p:sldId id="260" r:id="rId6"/>
     <p:sldId id="261" r:id="rId7"/>
   </p:sldIdLst>
-  <p:notesMasterIdLst>
-    <p:notesMasterId r:id="rId8"/>
-  </p:notesMasterIdLst>
   <p:sldSz cx="12192000" cy="6858000"/>
   <p:notesSz cx="6858000" cy="12192000"/>
   <p:defaultTextStyle>
@@ -109,6 +109,11 @@
       </a:defRPr>
     </a:lvl9pPr>
   </p:defaultTextStyle>
+  <p:extLst>
+    <p:ext uri="{EFAFB233-063F-42B5-8137-9DF3F51BA10A}">
+      <p15:sldGuideLst xmlns:p15="http://schemas.microsoft.com/office/powerpoint/2012/main"/>
+    </p:ext>
+  </p:extLst>
 </p:presentation>
 </file>
 
@@ -134,234 +139,10 @@
           <a:chExt cx="0" cy="0"/>
         </a:xfrm>
       </p:grpSpPr>
-      <p:sp>
-        <p:nvSpPr>
-          <p:cNvPr id="2" name="Header Placeholder 1"/>
-          <p:cNvSpPr>
-            <a:spLocks noGrp="1"/>
-          </p:cNvSpPr>
-          <p:nvPr>
-            <p:ph type="hdr" sz="quarter"/>
-          </p:nvPr>
-        </p:nvSpPr>
-        <p:spPr>
-          <a:xfrm>
-            <a:off x="0" y="0"/>
-            <a:ext cx="2971800" cy="458788"/>
-          </a:xfrm>
-          <a:prstGeom prst="rect">
-            <a:avLst/>
-          </a:prstGeom>
-        </p:spPr>
-        <p:txBody>
-          <a:bodyPr vert="horz" lIns="91440" tIns="45720" rIns="91440" bIns="45720" rtlCol="0"/>
-          <a:lstStyle>
-            <a:lvl1pPr algn="l">
-              <a:defRPr sz="1200"/>
-            </a:lvl1pPr>
-          </a:lstStyle>
-          <a:p>
-            <a:endParaRPr lang="en-US"/>
-          </a:p>
-        </p:txBody>
-      </p:sp>
-      <p:sp>
-        <p:nvSpPr>
-          <p:cNvPr id="3" name="Date Placeholder 2"/>
-          <p:cNvSpPr>
-            <a:spLocks noGrp="1"/>
-          </p:cNvSpPr>
-          <p:nvPr>
-            <p:ph type="dt" idx="1"/>
-          </p:nvPr>
-        </p:nvSpPr>
-        <p:spPr>
-          <a:xfrm>
-            <a:off x="3884613" y="0"/>
-            <a:ext cx="2971800" cy="458788"/>
-          </a:xfrm>
-          <a:prstGeom prst="rect">
-            <a:avLst/>
-          </a:prstGeom>
-        </p:spPr>
-        <p:txBody>
-          <a:bodyPr vert="horz" lIns="91440" tIns="45720" rIns="91440" bIns="45720" rtlCol="0"/>
-          <a:lstStyle>
-            <a:lvl1pPr algn="r">
-              <a:defRPr sz="1200"/>
-            </a:lvl1pPr>
-          </a:lstStyle>
-          <a:p>
-            <a:fld id="{5282F153-3F37-0F45-9E97-73ACFA13230C}" type="datetimeFigureOut">
-              <a:rPr lang="en-US"/>
-              <a:t>7/23/19</a:t>
-            </a:fld>
-            <a:endParaRPr lang="en-US"/>
-          </a:p>
-        </p:txBody>
-      </p:sp>
-      <p:sp>
-        <p:nvSpPr>
-          <p:cNvPr id="4" name="Slide Image Placeholder 3"/>
-          <p:cNvSpPr>
-            <a:spLocks noGrp="1" noRot="1" noChangeAspect="1"/>
-          </p:cNvSpPr>
-          <p:nvPr>
-            <p:ph type="sldImg" idx="2"/>
-          </p:nvPr>
-        </p:nvSpPr>
-        <p:spPr>
-          <a:xfrm>
-            <a:off x="685800" y="1143000"/>
-            <a:ext cx="5486400" cy="3086100"/>
-          </a:xfrm>
-          <a:prstGeom prst="rect">
-            <a:avLst/>
-          </a:prstGeom>
-          <a:noFill/>
-          <a:ln w="12700">
-            <a:solidFill>
-              <a:prstClr val="black"/>
-            </a:solidFill>
-          </a:ln>
-        </p:spPr>
-        <p:txBody>
-          <a:bodyPr vert="horz" lIns="91440" tIns="45720" rIns="91440" bIns="45720" rtlCol="0" anchor="ctr"/>
-          <a:lstStyle/>
-          <a:p>
-            <a:endParaRPr lang="en-US"/>
-          </a:p>
-        </p:txBody>
-      </p:sp>
-      <p:sp>
-        <p:nvSpPr>
-          <p:cNvPr id="5" name="Notes Placeholder 4"/>
-          <p:cNvSpPr>
-            <a:spLocks noGrp="1"/>
-          </p:cNvSpPr>
-          <p:nvPr>
-            <p:ph type="body" sz="quarter" idx="3"/>
-          </p:nvPr>
-        </p:nvSpPr>
-        <p:spPr>
-          <a:xfrm>
-            <a:off x="685800" y="4400550"/>
-            <a:ext cx="5486400" cy="3600450"/>
-          </a:xfrm>
-          <a:prstGeom prst="rect">
-            <a:avLst/>
-          </a:prstGeom>
-        </p:spPr>
-        <p:txBody>
-          <a:bodyPr vert="horz" lIns="91440" tIns="45720" rIns="91440" bIns="45720" rtlCol="0"/>
-          <a:lstStyle/>
-          <a:p>
-            <a:pPr lvl="0"/>
-            <a:r>
-              <a:rPr lang="en-US"/>
-              <a:t>Click to edit Master text styles</a:t>
-            </a:r>
-          </a:p>
-          <a:p>
-            <a:pPr lvl="1"/>
-            <a:r>
-              <a:rPr lang="en-US"/>
-              <a:t>Second level</a:t>
-            </a:r>
-          </a:p>
-          <a:p>
-            <a:pPr lvl="2"/>
-            <a:r>
-              <a:rPr lang="en-US"/>
-              <a:t>Third level</a:t>
-            </a:r>
-          </a:p>
-          <a:p>
-            <a:pPr lvl="3"/>
-            <a:r>
-              <a:rPr lang="en-US"/>
-              <a:t>Fourth level</a:t>
-            </a:r>
-          </a:p>
-          <a:p>
-            <a:pPr lvl="4"/>
-            <a:r>
-              <a:rPr lang="en-US"/>
-              <a:t>Fifth level</a:t>
-            </a:r>
-          </a:p>
-        </p:txBody>
-      </p:sp>
-      <p:sp>
-        <p:nvSpPr>
-          <p:cNvPr id="6" name="Footer Placeholder 5"/>
-          <p:cNvSpPr>
-            <a:spLocks noGrp="1"/>
-          </p:cNvSpPr>
-          <p:nvPr>
-            <p:ph type="ftr" sz="quarter" idx="4"/>
-          </p:nvPr>
-        </p:nvSpPr>
-        <p:spPr>
-          <a:xfrm>
-            <a:off x="0" y="8685213"/>
-            <a:ext cx="2971800" cy="458787"/>
-          </a:xfrm>
-          <a:prstGeom prst="rect">
-            <a:avLst/>
-          </a:prstGeom>
-        </p:spPr>
-        <p:txBody>
-          <a:bodyPr vert="horz" lIns="91440" tIns="45720" rIns="91440" bIns="45720" rtlCol="0" anchor="b"/>
-          <a:lstStyle>
-            <a:lvl1pPr algn="l">
-              <a:defRPr sz="1200"/>
-            </a:lvl1pPr>
-          </a:lstStyle>
-          <a:p>
-            <a:endParaRPr lang="en-US"/>
-          </a:p>
-        </p:txBody>
-      </p:sp>
-      <p:sp>
-        <p:nvSpPr>
-          <p:cNvPr id="7" name="Slide Number Placeholder 6"/>
-          <p:cNvSpPr>
-            <a:spLocks noGrp="1"/>
-          </p:cNvSpPr>
-          <p:nvPr>
-            <p:ph type="sldNum" sz="quarter" idx="5"/>
-          </p:nvPr>
-        </p:nvSpPr>
-        <p:spPr>
-          <a:xfrm>
-            <a:off x="3884613" y="8685213"/>
-            <a:ext cx="2971800" cy="458787"/>
-          </a:xfrm>
-          <a:prstGeom prst="rect">
-            <a:avLst/>
-          </a:prstGeom>
-        </p:spPr>
-        <p:txBody>
-          <a:bodyPr vert="horz" lIns="91440" tIns="45720" rIns="91440" bIns="45720" rtlCol="0" anchor="b"/>
-          <a:lstStyle>
-            <a:lvl1pPr algn="r">
-              <a:defRPr sz="1200"/>
-            </a:lvl1pPr>
-          </a:lstStyle>
-          <a:p>
-            <a:fld id="{CE5E9CC1-C706-0F49-92D6-E571CC5EEA8F}" type="slidenum">
-              <a:rPr lang="en-US"/>
-              <a:t>‹#›</a:t>
-            </a:fld>
-            <a:endParaRPr lang="en-US"/>
-          </a:p>
-        </p:txBody>
-      </p:sp>
     </p:spTree>
     <p:extLst>
       <p:ext uri="{BB962C8B-B14F-4D97-AF65-F5344CB8AC3E}">
-        <p14:creationId xmlns:p14="http://schemas.microsoft.com/office/powerpoint/2010/main" val="1024086991"/>
+        <p14:creationId xmlns:p14="http://schemas.microsoft.com/office/powerpoint/2010/main" val="3307954104"/>
       </p:ext>
     </p:extLst>
   </p:cSld>
@@ -505,10 +286,6 @@
           <a:bodyPr/>
           <a:lstStyle/>
           <a:p>
-            <a:r>
-              <a:rPr lang="en-US" dirty="0"/>
-              <a:t/>
-            </a:r>
             <a:endParaRPr lang="en-US" dirty="0"/>
           </a:p>
         </p:txBody>
@@ -593,10 +370,6 @@
           <a:bodyPr/>
           <a:lstStyle/>
           <a:p>
-            <a:r>
-              <a:rPr lang="en-US" dirty="0"/>
-              <a:t/>
-            </a:r>
             <a:endParaRPr lang="en-US" dirty="0"/>
           </a:p>
         </p:txBody>
@@ -681,10 +454,6 @@
           <a:bodyPr/>
           <a:lstStyle/>
           <a:p>
-            <a:r>
-              <a:rPr lang="en-US" dirty="0"/>
-              <a:t/>
-            </a:r>
             <a:endParaRPr lang="en-US" dirty="0"/>
           </a:p>
         </p:txBody>
@@ -769,10 +538,6 @@
           <a:bodyPr/>
           <a:lstStyle/>
           <a:p>
-            <a:r>
-              <a:rPr lang="en-US" dirty="0"/>
-              <a:t/>
-            </a:r>
             <a:endParaRPr lang="en-US" dirty="0"/>
           </a:p>
         </p:txBody>
@@ -857,10 +622,6 @@
           <a:bodyPr/>
           <a:lstStyle/>
           <a:p>
-            <a:r>
-              <a:rPr lang="en-US" dirty="0"/>
-              <a:t/>
-            </a:r>
             <a:endParaRPr lang="en-US" dirty="0"/>
           </a:p>
         </p:txBody>
@@ -945,10 +706,6 @@
           <a:bodyPr/>
           <a:lstStyle/>
           <a:p>
-            <a:r>
-              <a:rPr lang="en-US" dirty="0"/>
-              <a:t/>
-            </a:r>
             <a:endParaRPr lang="en-US" dirty="0"/>
           </a:p>
         </p:txBody>
@@ -1022,6 +779,11 @@
 <file path=ppt/slideMasters/slideMaster1.xml><?xml version="1.0" encoding="utf-8"?>
 <p:sldMaster xmlns:a="http://schemas.openxmlformats.org/drawingml/2006/main" xmlns:r="http://schemas.openxmlformats.org/officeDocument/2006/relationships" xmlns:p="http://schemas.openxmlformats.org/presentationml/2006/main">
   <p:cSld>
+    <p:bg>
+      <p:bgRef idx="1001">
+        <a:schemeClr val="bg1"/>
+      </p:bgRef>
+    </p:bg>
     <p:spTree>
       <p:nvGrpSpPr>
         <p:cNvPr id="1" name=""/>
@@ -1321,7 +1083,7 @@
         </p:nvSpPr>
         <p:spPr>
           <a:xfrm>
-            <a:off x="0" y="0"/>
+            <a:off x="-1" y="0"/>
             <a:ext cx="12191695" cy="6858000"/>
           </a:xfrm>
           <a:prstGeom prst="rect">
@@ -1332,6 +1094,13 @@
           </a:solidFill>
           <a:ln/>
         </p:spPr>
+        <p:txBody>
+          <a:bodyPr/>
+          <a:lstStyle/>
+          <a:p>
+            <a:endParaRPr lang="zh-Hans-HK" altLang="en-US"/>
+          </a:p>
+        </p:txBody>
       </p:sp>
       <p:sp>
         <p:nvSpPr>
@@ -1354,7 +1123,7 @@
           <a:bodyPr wrap="square" rtlCol="0" anchor="ctr"/>
           <a:lstStyle/>
           <a:p>
-            <a:pPr indent="0" marL="0">
+            <a:pPr marL="0" indent="0">
               <a:buNone/>
             </a:pPr>
             <a:r>
@@ -1390,7 +1159,7 @@
           <a:bodyPr wrap="square" rtlCol="0" anchor="ctr"/>
           <a:lstStyle/>
           <a:p>
-            <a:pPr indent="0" marL="0">
+            <a:pPr marL="0" indent="0">
               <a:buNone/>
             </a:pPr>
             <a:r>
@@ -1426,18 +1195,18 @@
           <a:bodyPr wrap="square" rtlCol="0" anchor="ctr"/>
           <a:lstStyle/>
           <a:p>
-            <a:pPr indent="0" marL="0">
+            <a:pPr marL="0" indent="0">
               <a:buNone/>
             </a:pPr>
             <a:r>
-              <a:rPr lang="en-US" sz="1400" dirty="0">
+              <a:rPr lang="en-US" altLang="zh-CN" sz="2400" dirty="0">
                 <a:solidFill>
                   <a:srgbClr val="CBD5E1"/>
                 </a:solidFill>
               </a:rPr>
-              <a:t>Edit: group no., names &amp; SIDs</a:t>
-            </a:r>
-            <a:endParaRPr lang="en-US" sz="1400" dirty="0"/>
+              <a:t>Name: Yan Chudong            SID: 14042677</a:t>
+            </a:r>
+            <a:endParaRPr lang="en-US" sz="2400" dirty="0"/>
           </a:p>
         </p:txBody>
       </p:sp>
@@ -1485,6 +1254,13 @@
           </a:solidFill>
           <a:ln/>
         </p:spPr>
+        <p:txBody>
+          <a:bodyPr/>
+          <a:lstStyle/>
+          <a:p>
+            <a:endParaRPr lang="zh-Hans-HK" altLang="en-US"/>
+          </a:p>
+        </p:txBody>
       </p:sp>
       <p:sp>
         <p:nvSpPr>
@@ -1507,7 +1283,7 @@
           <a:bodyPr wrap="square" rtlCol="0" anchor="ctr"/>
           <a:lstStyle/>
           <a:p>
-            <a:pPr indent="0" marL="0">
+            <a:pPr marL="0" indent="0">
               <a:buNone/>
             </a:pPr>
             <a:r>
@@ -1546,6 +1322,13 @@
             <a:prstDash val="solid"/>
           </a:ln>
         </p:spPr>
+        <p:txBody>
+          <a:bodyPr/>
+          <a:lstStyle/>
+          <a:p>
+            <a:endParaRPr lang="zh-Hans-HK" altLang="en-US"/>
+          </a:p>
+        </p:txBody>
       </p:sp>
       <p:sp>
         <p:nvSpPr>
@@ -1568,7 +1351,7 @@
           <a:bodyPr wrap="square" rtlCol="0" anchor="ctr"/>
           <a:lstStyle/>
           <a:p>
-            <a:pPr indent="0" marL="0">
+            <a:pPr marL="0" indent="0">
               <a:buNone/>
             </a:pPr>
             <a:r>
@@ -1739,6 +1522,13 @@
           </a:solidFill>
           <a:ln/>
         </p:spPr>
+        <p:txBody>
+          <a:bodyPr/>
+          <a:lstStyle/>
+          <a:p>
+            <a:endParaRPr lang="zh-Hans-HK" altLang="en-US"/>
+          </a:p>
+        </p:txBody>
       </p:sp>
       <p:sp>
         <p:nvSpPr>
@@ -1761,7 +1551,7 @@
           <a:bodyPr wrap="square" rtlCol="0" anchor="ctr"/>
           <a:lstStyle/>
           <a:p>
-            <a:pPr indent="0" marL="0">
+            <a:pPr marL="0" indent="0">
               <a:buNone/>
             </a:pPr>
             <a:r>
@@ -1800,6 +1590,13 @@
             <a:prstDash val="solid"/>
           </a:ln>
         </p:spPr>
+        <p:txBody>
+          <a:bodyPr/>
+          <a:lstStyle/>
+          <a:p>
+            <a:endParaRPr lang="zh-Hans-HK" altLang="en-US"/>
+          </a:p>
+        </p:txBody>
       </p:sp>
       <p:sp>
         <p:nvSpPr>
@@ -1822,7 +1619,7 @@
           <a:bodyPr wrap="square" rtlCol="0" anchor="ctr"/>
           <a:lstStyle/>
           <a:p>
-            <a:pPr indent="0" marL="0">
+            <a:pPr marL="0" indent="0">
               <a:buNone/>
             </a:pPr>
             <a:r>
@@ -1940,7 +1737,7 @@
           <a:bodyPr wrap="square" rtlCol="0" anchor="ctr"/>
           <a:lstStyle/>
           <a:p>
-            <a:pPr indent="0" marL="0">
+            <a:pPr marL="0" indent="0">
               <a:buNone/>
             </a:pPr>
             <a:r>
@@ -2061,6 +1858,13 @@
             <a:prstDash val="solid"/>
           </a:ln>
         </p:spPr>
+        <p:txBody>
+          <a:bodyPr/>
+          <a:lstStyle/>
+          <a:p>
+            <a:endParaRPr lang="zh-Hans-HK" altLang="en-US"/>
+          </a:p>
+        </p:txBody>
       </p:sp>
       <p:sp>
         <p:nvSpPr>
@@ -2083,7 +1887,7 @@
           <a:bodyPr wrap="square" rtlCol="0" anchor="ctr"/>
           <a:lstStyle/>
           <a:p>
-            <a:pPr indent="0" marL="0">
+            <a:pPr marL="0" indent="0">
               <a:buNone/>
             </a:pPr>
             <a:r>
@@ -2119,7 +1923,7 @@
           <a:bodyPr wrap="square" rtlCol="0" anchor="ctr"/>
           <a:lstStyle/>
           <a:p>
-            <a:pPr indent="0" marL="0">
+            <a:pPr marL="0" indent="0">
               <a:buNone/>
             </a:pPr>
             <a:r>
@@ -2178,6 +1982,13 @@
           </a:solidFill>
           <a:ln/>
         </p:spPr>
+        <p:txBody>
+          <a:bodyPr/>
+          <a:lstStyle/>
+          <a:p>
+            <a:endParaRPr lang="zh-Hans-HK" altLang="en-US"/>
+          </a:p>
+        </p:txBody>
       </p:sp>
       <p:sp>
         <p:nvSpPr>
@@ -2200,7 +2011,7 @@
           <a:bodyPr wrap="square" rtlCol="0" anchor="ctr"/>
           <a:lstStyle/>
           <a:p>
-            <a:pPr indent="0" marL="0">
+            <a:pPr marL="0" indent="0">
               <a:buNone/>
             </a:pPr>
             <a:r>
@@ -2239,6 +2050,13 @@
             <a:prstDash val="solid"/>
           </a:ln>
         </p:spPr>
+        <p:txBody>
+          <a:bodyPr/>
+          <a:lstStyle/>
+          <a:p>
+            <a:endParaRPr lang="zh-Hans-HK" altLang="en-US"/>
+          </a:p>
+        </p:txBody>
       </p:sp>
       <p:sp>
         <p:nvSpPr>
@@ -2261,7 +2079,7 @@
           <a:bodyPr wrap="square" rtlCol="0" anchor="ctr"/>
           <a:lstStyle/>
           <a:p>
-            <a:pPr indent="0" marL="0">
+            <a:pPr marL="0" indent="0">
               <a:buNone/>
             </a:pPr>
             <a:r>
@@ -2364,7 +2182,7 @@
           <a:bodyPr wrap="square" rtlCol="0" anchor="ctr"/>
           <a:lstStyle/>
           <a:p>
-            <a:pPr indent="0" marL="0">
+            <a:pPr marL="0" indent="0">
               <a:buNone/>
             </a:pPr>
             <a:r>
@@ -2490,6 +2308,13 @@
           </a:solidFill>
           <a:ln/>
         </p:spPr>
+        <p:txBody>
+          <a:bodyPr/>
+          <a:lstStyle/>
+          <a:p>
+            <a:endParaRPr lang="zh-Hans-HK" altLang="en-US"/>
+          </a:p>
+        </p:txBody>
       </p:sp>
       <p:sp>
         <p:nvSpPr>
@@ -2512,7 +2337,7 @@
           <a:bodyPr wrap="square" rtlCol="0" anchor="ctr"/>
           <a:lstStyle/>
           <a:p>
-            <a:pPr indent="0" marL="0">
+            <a:pPr marL="0" indent="0">
               <a:buNone/>
             </a:pPr>
             <a:r>
@@ -2535,7 +2360,7 @@
         </p:nvSpPr>
         <p:spPr>
           <a:xfrm>
-            <a:off x="548640" y="1097280"/>
+            <a:off x="613035" y="1097280"/>
             <a:ext cx="11094415" cy="5394960"/>
           </a:xfrm>
           <a:prstGeom prst="roundRect">
@@ -2551,6 +2376,13 @@
             <a:prstDash val="solid"/>
           </a:ln>
         </p:spPr>
+        <p:txBody>
+          <a:bodyPr/>
+          <a:lstStyle/>
+          <a:p>
+            <a:endParaRPr lang="zh-Hans-HK" altLang="en-US" dirty="0"/>
+          </a:p>
+        </p:txBody>
       </p:sp>
       <p:sp>
         <p:nvSpPr>
@@ -2573,7 +2405,7 @@
           <a:bodyPr wrap="square" rtlCol="0" anchor="ctr"/>
           <a:lstStyle/>
           <a:p>
-            <a:pPr indent="0" marL="0">
+            <a:pPr marL="0" indent="0">
               <a:buNone/>
             </a:pPr>
             <a:r>
@@ -2609,7 +2441,7 @@
           <a:bodyPr wrap="square" rtlCol="0" anchor="ctr"/>
           <a:lstStyle/>
           <a:p>
-            <a:pPr indent="0" marL="0">
+            <a:pPr marL="0" indent="0">
               <a:buNone/>
             </a:pPr>
             <a:r>
@@ -2645,7 +2477,7 @@
           <a:bodyPr wrap="square" rtlCol="0" anchor="ctr"/>
           <a:lstStyle/>
           <a:p>
-            <a:pPr indent="0" marL="0">
+            <a:pPr marL="0" indent="0">
               <a:buNone/>
             </a:pPr>
             <a:r>
@@ -2681,7 +2513,7 @@
           <a:bodyPr wrap="square" rtlCol="0" anchor="ctr"/>
           <a:lstStyle/>
           <a:p>
-            <a:pPr indent="0" marL="0">
+            <a:pPr marL="0" indent="0">
               <a:buNone/>
             </a:pPr>
             <a:r>
@@ -2696,42 +2528,36 @@
           </a:p>
         </p:txBody>
       </p:sp>
-      <p:sp>
-        <p:nvSpPr>
-          <p:cNvPr id="9" name="Text 7"/>
-          <p:cNvSpPr/>
-          <p:nvPr/>
-        </p:nvSpPr>
-        <p:spPr>
-          <a:xfrm>
-            <a:off x="822960" y="4754880"/>
-            <a:ext cx="10545775" cy="914400"/>
-          </a:xfrm>
-          <a:prstGeom prst="rect">
-            <a:avLst/>
-          </a:prstGeom>
-          <a:noFill/>
-          <a:ln/>
-        </p:spPr>
-        <p:txBody>
-          <a:bodyPr wrap="square" rtlCol="0" anchor="ctr"/>
-          <a:lstStyle/>
-          <a:p>
-            <a:pPr indent="0" marL="0">
-              <a:buNone/>
-            </a:pPr>
-            <a:r>
-              <a:rPr lang="en-US" sz="1600" dirty="0">
-                <a:solidFill>
-                  <a:srgbClr val="CBD5E1"/>
-                </a:solidFill>
-              </a:rPr>
-              <a:t>Tip: record your screen while you run these commands and do 2–3 quick operations.</a:t>
-            </a:r>
-            <a:endParaRPr lang="en-US" sz="1600" dirty="0"/>
-          </a:p>
-        </p:txBody>
-      </p:sp>
+      <p:pic>
+        <p:nvPicPr>
+          <p:cNvPr id="13" name="图片 12" descr="The image shows a terminal window interface displaying a Python command prompt and a series of Python scripts being executed, displaying different lists of numbers being sorted in both ascending and descending order.&#10;&#10;AI 生成的内容可能不正确。">
+            <a:extLst>
+              <a:ext uri="{FF2B5EF4-FFF2-40B4-BE49-F238E27FC236}">
+                <a16:creationId xmlns:a16="http://schemas.microsoft.com/office/drawing/2014/main" id="{2D568FA3-0C97-39A1-D4FE-BC03D46976A4}"/>
+              </a:ext>
+            </a:extLst>
+          </p:cNvPr>
+          <p:cNvPicPr>
+            <a:picLocks noChangeAspect="1"/>
+          </p:cNvPicPr>
+          <p:nvPr/>
+        </p:nvPicPr>
+        <p:blipFill>
+          <a:blip r:embed="rId3"/>
+          <a:stretch>
+            <a:fillRect/>
+          </a:stretch>
+        </p:blipFill>
+        <p:spPr>
+          <a:xfrm>
+            <a:off x="3868508" y="1737360"/>
+            <a:ext cx="7710152" cy="3613812"/>
+          </a:xfrm>
+          <a:prstGeom prst="rect">
+            <a:avLst/>
+          </a:prstGeom>
+        </p:spPr>
+      </p:pic>
     </p:spTree>
   </p:cSld>
   <p:clrMapOvr>
@@ -2776,6 +2602,13 @@
           </a:solidFill>
           <a:ln/>
         </p:spPr>
+        <p:txBody>
+          <a:bodyPr/>
+          <a:lstStyle/>
+          <a:p>
+            <a:endParaRPr lang="zh-Hans-HK" altLang="en-US"/>
+          </a:p>
+        </p:txBody>
       </p:sp>
       <p:sp>
         <p:nvSpPr>
@@ -2798,7 +2631,7 @@
           <a:bodyPr wrap="square" rtlCol="0" anchor="ctr"/>
           <a:lstStyle/>
           <a:p>
-            <a:pPr indent="0" marL="0">
+            <a:pPr marL="0" indent="0">
               <a:buNone/>
             </a:pPr>
             <a:r>
@@ -2834,7 +2667,7 @@
           <a:bodyPr wrap="square" rtlCol="0" anchor="ctr"/>
           <a:lstStyle/>
           <a:p>
-            <a:pPr indent="0" marL="0">
+            <a:pPr marL="0" indent="0">
               <a:buNone/>
             </a:pPr>
             <a:r>
@@ -2870,7 +2703,7 @@
           <a:bodyPr wrap="square" rtlCol="0" anchor="ctr"/>
           <a:lstStyle/>
           <a:p>
-            <a:pPr indent="0" marL="0">
+            <a:pPr marL="0" indent="0">
               <a:buNone/>
             </a:pPr>
             <a:r>
@@ -3186,4 +3019,319 @@
     </a:ext>
   </a:extLst>
 </a:theme>
+</file>
+
+<file path=ppt/theme/theme2.xml><?xml version="1.0" encoding="utf-8"?>
+<a:theme xmlns:a="http://schemas.openxmlformats.org/drawingml/2006/main" name="Office 主题​​">
+  <a:themeElements>
+    <a:clrScheme name="Office">
+      <a:dk1>
+        <a:sysClr val="windowText" lastClr="000000"/>
+      </a:dk1>
+      <a:lt1>
+        <a:sysClr val="window" lastClr="FFFFFF"/>
+      </a:lt1>
+      <a:dk2>
+        <a:srgbClr val="0E2841"/>
+      </a:dk2>
+      <a:lt2>
+        <a:srgbClr val="E8E8E8"/>
+      </a:lt2>
+      <a:accent1>
+        <a:srgbClr val="156082"/>
+      </a:accent1>
+      <a:accent2>
+        <a:srgbClr val="E97132"/>
+      </a:accent2>
+      <a:accent3>
+        <a:srgbClr val="196B24"/>
+      </a:accent3>
+      <a:accent4>
+        <a:srgbClr val="0F9ED5"/>
+      </a:accent4>
+      <a:accent5>
+        <a:srgbClr val="A02B93"/>
+      </a:accent5>
+      <a:accent6>
+        <a:srgbClr val="4EA72E"/>
+      </a:accent6>
+      <a:hlink>
+        <a:srgbClr val="467886"/>
+      </a:hlink>
+      <a:folHlink>
+        <a:srgbClr val="96607D"/>
+      </a:folHlink>
+    </a:clrScheme>
+    <a:fontScheme name="Office">
+      <a:majorFont>
+        <a:latin typeface="Aptos Display" panose="02110004020202020204"/>
+        <a:ea typeface=""/>
+        <a:cs typeface=""/>
+        <a:font script="Jpan" typeface="游ゴシック Light"/>
+        <a:font script="Hang" typeface="맑은 고딕"/>
+        <a:font script="Hans" typeface="等线 Light"/>
+        <a:font script="Hant" typeface="新細明體"/>
+        <a:font script="Arab" typeface="Times New Roman"/>
+        <a:font script="Hebr" typeface="Times New Roman"/>
+        <a:font script="Thai" typeface="Angsana New"/>
+        <a:font script="Ethi" typeface="Nyala"/>
+        <a:font script="Beng" typeface="Vrinda"/>
+        <a:font script="Gujr" typeface="Shruti"/>
+        <a:font script="Khmr" typeface="MoolBoran"/>
+        <a:font script="Knda" typeface="Tunga"/>
+        <a:font script="Guru" typeface="Raavi"/>
+        <a:font script="Cans" typeface="Euphemia"/>
+        <a:font script="Cher" typeface="Plantagenet Cherokee"/>
+        <a:font script="Yiii" typeface="Microsoft Yi Baiti"/>
+        <a:font script="Tibt" typeface="Microsoft Himalaya"/>
+        <a:font script="Thaa" typeface="MV Boli"/>
+        <a:font script="Deva" typeface="Mangal"/>
+        <a:font script="Telu" typeface="Gautami"/>
+        <a:font script="Taml" typeface="Latha"/>
+        <a:font script="Syrc" typeface="Estrangelo Edessa"/>
+        <a:font script="Orya" typeface="Kalinga"/>
+        <a:font script="Mlym" typeface="Kartika"/>
+        <a:font script="Laoo" typeface="DokChampa"/>
+        <a:font script="Sinh" typeface="Iskoola Pota"/>
+        <a:font script="Mong" typeface="Mongolian Baiti"/>
+        <a:font script="Viet" typeface="Times New Roman"/>
+        <a:font script="Uigh" typeface="Microsoft Uighur"/>
+        <a:font script="Geor" typeface="Sylfaen"/>
+        <a:font script="Armn" typeface="Arial"/>
+        <a:font script="Bugi" typeface="Leelawadee UI"/>
+        <a:font script="Bopo" typeface="Microsoft JhengHei"/>
+        <a:font script="Java" typeface="Javanese Text"/>
+        <a:font script="Lisu" typeface="Segoe UI"/>
+        <a:font script="Mymr" typeface="Myanmar Text"/>
+        <a:font script="Nkoo" typeface="Ebrima"/>
+        <a:font script="Olck" typeface="Nirmala UI"/>
+        <a:font script="Osma" typeface="Ebrima"/>
+        <a:font script="Phag" typeface="Phagspa"/>
+        <a:font script="Syrn" typeface="Estrangelo Edessa"/>
+        <a:font script="Syrj" typeface="Estrangelo Edessa"/>
+        <a:font script="Syre" typeface="Estrangelo Edessa"/>
+        <a:font script="Sora" typeface="Nirmala UI"/>
+        <a:font script="Tale" typeface="Microsoft Tai Le"/>
+        <a:font script="Talu" typeface="Microsoft New Tai Lue"/>
+        <a:font script="Tfng" typeface="Ebrima"/>
+      </a:majorFont>
+      <a:minorFont>
+        <a:latin typeface="Aptos" panose="02110004020202020204"/>
+        <a:ea typeface=""/>
+        <a:cs typeface=""/>
+        <a:font script="Jpan" typeface="游ゴシック"/>
+        <a:font script="Hang" typeface="맑은 고딕"/>
+        <a:font script="Hans" typeface="等线"/>
+        <a:font script="Hant" typeface="新細明體"/>
+        <a:font script="Arab" typeface="Arial"/>
+        <a:font script="Hebr" typeface="Arial"/>
+        <a:font script="Thai" typeface="Cordia New"/>
+        <a:font script="Ethi" typeface="Nyala"/>
+        <a:font script="Beng" typeface="Vrinda"/>
+        <a:font script="Gujr" typeface="Shruti"/>
+        <a:font script="Khmr" typeface="DaunPenh"/>
+        <a:font script="Knda" typeface="Tunga"/>
+        <a:font script="Guru" typeface="Raavi"/>
+        <a:font script="Cans" typeface="Euphemia"/>
+        <a:font script="Cher" typeface="Plantagenet Cherokee"/>
+        <a:font script="Yiii" typeface="Microsoft Yi Baiti"/>
+        <a:font script="Tibt" typeface="Microsoft Himalaya"/>
+        <a:font script="Thaa" typeface="MV Boli"/>
+        <a:font script="Deva" typeface="Mangal"/>
+        <a:font script="Telu" typeface="Gautami"/>
+        <a:font script="Taml" typeface="Latha"/>
+        <a:font script="Syrc" typeface="Estrangelo Edessa"/>
+        <a:font script="Orya" typeface="Kalinga"/>
+        <a:font script="Mlym" typeface="Kartika"/>
+        <a:font script="Laoo" typeface="DokChampa"/>
+        <a:font script="Sinh" typeface="Iskoola Pota"/>
+        <a:font script="Mong" typeface="Mongolian Baiti"/>
+        <a:font script="Viet" typeface="Arial"/>
+        <a:font script="Uigh" typeface="Microsoft Uighur"/>
+        <a:font script="Geor" typeface="Sylfaen"/>
+        <a:font script="Armn" typeface="Arial"/>
+        <a:font script="Bugi" typeface="Leelawadee UI"/>
+        <a:font script="Bopo" typeface="Microsoft JhengHei"/>
+        <a:font script="Java" typeface="Javanese Text"/>
+        <a:font script="Lisu" typeface="Segoe UI"/>
+        <a:font script="Mymr" typeface="Myanmar Text"/>
+        <a:font script="Nkoo" typeface="Ebrima"/>
+        <a:font script="Olck" typeface="Nirmala UI"/>
+        <a:font script="Osma" typeface="Ebrima"/>
+        <a:font script="Phag" typeface="Phagspa"/>
+        <a:font script="Syrn" typeface="Estrangelo Edessa"/>
+        <a:font script="Syrj" typeface="Estrangelo Edessa"/>
+        <a:font script="Syre" typeface="Estrangelo Edessa"/>
+        <a:font script="Sora" typeface="Nirmala UI"/>
+        <a:font script="Tale" typeface="Microsoft Tai Le"/>
+        <a:font script="Talu" typeface="Microsoft New Tai Lue"/>
+        <a:font script="Tfng" typeface="Ebrima"/>
+      </a:minorFont>
+    </a:fontScheme>
+    <a:fmtScheme name="Office">
+      <a:fillStyleLst>
+        <a:solidFill>
+          <a:schemeClr val="phClr"/>
+        </a:solidFill>
+        <a:gradFill rotWithShape="1">
+          <a:gsLst>
+            <a:gs pos="0">
+              <a:schemeClr val="phClr">
+                <a:lumMod val="110000"/>
+                <a:satMod val="105000"/>
+                <a:tint val="67000"/>
+              </a:schemeClr>
+            </a:gs>
+            <a:gs pos="50000">
+              <a:schemeClr val="phClr">
+                <a:lumMod val="105000"/>
+                <a:satMod val="103000"/>
+                <a:tint val="73000"/>
+              </a:schemeClr>
+            </a:gs>
+            <a:gs pos="100000">
+              <a:schemeClr val="phClr">
+                <a:lumMod val="105000"/>
+                <a:satMod val="109000"/>
+                <a:tint val="81000"/>
+              </a:schemeClr>
+            </a:gs>
+          </a:gsLst>
+          <a:lin ang="5400000" scaled="0"/>
+        </a:gradFill>
+        <a:gradFill rotWithShape="1">
+          <a:gsLst>
+            <a:gs pos="0">
+              <a:schemeClr val="phClr">
+                <a:satMod val="103000"/>
+                <a:lumMod val="102000"/>
+                <a:tint val="94000"/>
+              </a:schemeClr>
+            </a:gs>
+            <a:gs pos="50000">
+              <a:schemeClr val="phClr">
+                <a:satMod val="110000"/>
+                <a:lumMod val="100000"/>
+                <a:shade val="100000"/>
+              </a:schemeClr>
+            </a:gs>
+            <a:gs pos="100000">
+              <a:schemeClr val="phClr">
+                <a:lumMod val="99000"/>
+                <a:satMod val="120000"/>
+                <a:shade val="78000"/>
+              </a:schemeClr>
+            </a:gs>
+          </a:gsLst>
+          <a:lin ang="5400000" scaled="0"/>
+        </a:gradFill>
+      </a:fillStyleLst>
+      <a:lnStyleLst>
+        <a:ln w="12700" cap="flat" cmpd="sng" algn="ctr">
+          <a:solidFill>
+            <a:schemeClr val="phClr"/>
+          </a:solidFill>
+          <a:prstDash val="solid"/>
+          <a:miter lim="800000"/>
+        </a:ln>
+        <a:ln w="19050" cap="flat" cmpd="sng" algn="ctr">
+          <a:solidFill>
+            <a:schemeClr val="phClr"/>
+          </a:solidFill>
+          <a:prstDash val="solid"/>
+          <a:miter lim="800000"/>
+        </a:ln>
+        <a:ln w="25400" cap="flat" cmpd="sng" algn="ctr">
+          <a:solidFill>
+            <a:schemeClr val="phClr"/>
+          </a:solidFill>
+          <a:prstDash val="solid"/>
+          <a:miter lim="800000"/>
+        </a:ln>
+      </a:lnStyleLst>
+      <a:effectStyleLst>
+        <a:effectStyle>
+          <a:effectLst/>
+        </a:effectStyle>
+        <a:effectStyle>
+          <a:effectLst/>
+        </a:effectStyle>
+        <a:effectStyle>
+          <a:effectLst>
+            <a:outerShdw blurRad="57150" dist="19050" dir="5400000" algn="ctr" rotWithShape="0">
+              <a:srgbClr val="000000">
+                <a:alpha val="63000"/>
+              </a:srgbClr>
+            </a:outerShdw>
+          </a:effectLst>
+        </a:effectStyle>
+      </a:effectStyleLst>
+      <a:bgFillStyleLst>
+        <a:solidFill>
+          <a:schemeClr val="phClr"/>
+        </a:solidFill>
+        <a:solidFill>
+          <a:schemeClr val="phClr">
+            <a:tint val="95000"/>
+            <a:satMod val="170000"/>
+          </a:schemeClr>
+        </a:solidFill>
+        <a:gradFill rotWithShape="1">
+          <a:gsLst>
+            <a:gs pos="0">
+              <a:schemeClr val="phClr">
+                <a:tint val="93000"/>
+                <a:satMod val="150000"/>
+                <a:shade val="98000"/>
+                <a:lumMod val="102000"/>
+              </a:schemeClr>
+            </a:gs>
+            <a:gs pos="50000">
+              <a:schemeClr val="phClr">
+                <a:tint val="98000"/>
+                <a:satMod val="130000"/>
+                <a:shade val="90000"/>
+                <a:lumMod val="103000"/>
+              </a:schemeClr>
+            </a:gs>
+            <a:gs pos="100000">
+              <a:schemeClr val="phClr">
+                <a:shade val="63000"/>
+                <a:satMod val="120000"/>
+              </a:schemeClr>
+            </a:gs>
+          </a:gsLst>
+          <a:lin ang="5400000" scaled="0"/>
+        </a:gradFill>
+      </a:bgFillStyleLst>
+    </a:fmtScheme>
+  </a:themeElements>
+  <a:objectDefaults>
+    <a:lnDef>
+      <a:spPr/>
+      <a:bodyPr/>
+      <a:lstStyle/>
+      <a:style>
+        <a:lnRef idx="2">
+          <a:schemeClr val="accent1"/>
+        </a:lnRef>
+        <a:fillRef idx="0">
+          <a:schemeClr val="accent1"/>
+        </a:fillRef>
+        <a:effectRef idx="1">
+          <a:schemeClr val="accent1"/>
+        </a:effectRef>
+        <a:fontRef idx="minor">
+          <a:schemeClr val="tx1"/>
+        </a:fontRef>
+      </a:style>
+    </a:lnDef>
+  </a:objectDefaults>
+  <a:extraClrSchemeLst/>
+  <a:extLst>
+    <a:ext uri="{05A4C25C-085E-4340-85A3-A5531E510DB2}">
+      <thm15:themeFamily xmlns:thm15="http://schemas.microsoft.com/office/thememl/2012/main" name="Office Theme" id="{2E142A2C-CD16-42D6-873A-C26D2A0506FA}" vid="{1BDDFF52-6CD6-40A5-AB3C-68EB2F1E4D0A}"/>
+    </a:ext>
+  </a:extLst>
+</a:theme>
 </file>